--- a/dist/초3/국어/읽기와어휘/초3_국어_읽기와어휘_01_문단의중심문장.pptx
+++ b/dist/초3/국어/읽기와어휘/초3_국어_읽기와어휘_01_문단의중심문장.pptx
@@ -119,39 +119,39 @@
   <p:extLst>
     <p:ext uri="{521415D9-36F7-43E2-AB2F-B90AF26B5E84}">
       <p14:sectionLst xmlns:p14="http://schemas.microsoft.com/office/powerpoint/2010/main">
-        <p14:section name="도입" id="{c667acbb-c630-6c5d-1ec0-687dc3c323d2}">
+        <p14:section name="도입" id="{423df8b7-5438-887b-31b8-c1483b08a51b}">
           <p14:sldIdLst>
             <p14:sldId id="256"/>
             <p14:sldId id="257"/>
           </p14:sldIdLst>
         </p14:section>
-        <p14:section name="개념" id="{e599657c-cc13-521d-4d42-0c0c83fdd216}">
+        <p14:section name="개념" id="{38e9ca35-9b3f-e7bb-dd5c-b6ab5139a8c2}">
           <p14:sldIdLst>
             <p14:sldId id="258"/>
             <p14:sldId id="259"/>
             <p14:sldId id="260"/>
           </p14:sldIdLst>
         </p14:section>
-        <p14:section name="연습" id="{4dd583ff-cd50-0813-a1b7-27d30d73fcd3}">
+        <p14:section name="연습" id="{192c44af-edf4-efd9-8211-feab67d0acc4}">
           <p14:sldIdLst>
             <p14:sldId id="261"/>
             <p14:sldId id="262"/>
             <p14:sldId id="263"/>
           </p14:sldIdLst>
         </p14:section>
-        <p14:section name="확인" id="{d7192740-4328-fbc4-d488-9c9ec0bdaa1a}">
+        <p14:section name="확인" id="{6a8bbf26-52aa-a198-d756-1adcec1a4c5a}">
           <p14:sldIdLst>
             <p14:sldId id="264"/>
             <p14:sldId id="265"/>
             <p14:sldId id="266"/>
           </p14:sldIdLst>
         </p14:section>
-        <p14:section name="정리" id="{b9f4d2fd-2e12-32f0-a6e0-001e80b38bcc}">
+        <p14:section name="정리" id="{a4b0154c-fba9-9ff3-2443-bf205edcea21}">
           <p14:sldIdLst>
             <p14:sldId id="267"/>
           </p14:sldIdLst>
         </p14:section>
-        <p14:section name="보충" id="{08eede95-3453-f61e-3fa0-7b08ba98e1c8}">
+        <p14:section name="보충" id="{1df86e43-7105-9eb9-c53d-21b90f0b4f22}">
           <p14:sldIdLst>
             <p14:sldId id="268"/>
           </p14:sldIdLst>
@@ -2818,7 +2818,7 @@
           <a:bodyPr wrap="square" lIns="0" tIns="0" rIns="0" bIns="0" rtlCol="0" anchor="ctr"/>
           <a:lstStyle/>
           <a:p>
-            <a:pPr algn="l" indent="0" marL="0">
+            <a:pPr eaLnBrk="0" algn="l" indent="0" marL="0">
               <a:buNone/>
             </a:pPr>
             <a:r>
@@ -2859,7 +2859,7 @@
           <a:bodyPr wrap="square" lIns="0" tIns="0" rIns="0" bIns="0" rtlCol="0" anchor="t"/>
           <a:lstStyle/>
           <a:p>
-            <a:pPr indent="0" marL="0">
+            <a:pPr eaLnBrk="0" indent="0" marL="0">
               <a:buNone/>
             </a:pPr>
             <a:r>
@@ -2925,7 +2925,7 @@
           <a:bodyPr wrap="square" lIns="0" tIns="0" rIns="0" bIns="0" rtlCol="0" anchor="ctr"/>
           <a:lstStyle/>
           <a:p>
-            <a:pPr indent="0" marL="0">
+            <a:pPr eaLnBrk="0" indent="0" marL="0">
               <a:spcAft>
                 <a:spcPts val="600"/>
               </a:spcAft>
@@ -2945,7 +2945,7 @@
             <a:endParaRPr lang="ko-KR" sz="3000" dirty="0"/>
           </a:p>
           <a:p>
-            <a:pPr indent="0" marL="0">
+            <a:pPr eaLnBrk="0" indent="0" marL="0">
               <a:spcAft>
                 <a:spcPts val="600"/>
               </a:spcAft>
@@ -2965,7 +2965,7 @@
             <a:endParaRPr lang="ko-KR" sz="3000" dirty="0"/>
           </a:p>
           <a:p>
-            <a:pPr indent="0" marL="0">
+            <a:pPr eaLnBrk="0" indent="0" marL="0">
               <a:spcAft>
                 <a:spcPts val="600"/>
               </a:spcAft>
@@ -3034,7 +3034,7 @@
           <a:bodyPr wrap="square" lIns="0" tIns="0" rIns="0" bIns="0" rtlCol="0" anchor="ctr"/>
           <a:lstStyle/>
           <a:p>
-            <a:pPr algn="l" indent="0" marL="0">
+            <a:pPr eaLnBrk="0" algn="l" indent="0" marL="0">
               <a:buNone/>
             </a:pPr>
             <a:r>
@@ -3100,7 +3100,7 @@
           <a:bodyPr wrap="square" lIns="0" tIns="0" rIns="0" bIns="0" rtlCol="0" anchor="ctr"/>
           <a:lstStyle/>
           <a:p>
-            <a:pPr indent="0" marL="0">
+            <a:pPr eaLnBrk="0" indent="0" marL="0">
               <a:spcAft>
                 <a:spcPts val="600"/>
               </a:spcAft>
@@ -3150,7 +3150,7 @@
           <a:bodyPr wrap="square" lIns="177800" tIns="0" rIns="177800" bIns="0" rtlCol="0" anchor="ctr"/>
           <a:lstStyle/>
           <a:p>
-            <a:pPr algn="l" indent="0" marL="0">
+            <a:pPr eaLnBrk="0" algn="l" indent="0" marL="0">
               <a:buNone/>
             </a:pPr>
             <a:r>
@@ -3189,7 +3189,7 @@
           <a:bodyPr wrap="square" lIns="0" tIns="0" rIns="0" bIns="0" rtlCol="0" anchor="ctr"/>
           <a:lstStyle/>
           <a:p>
-            <a:pPr algn="l" indent="0" marL="0">
+            <a:pPr eaLnBrk="0" algn="l" indent="0" marL="0">
               <a:buNone/>
             </a:pPr>
             <a:r>
@@ -3228,7 +3228,7 @@
           <a:bodyPr wrap="square" lIns="0" tIns="0" rIns="0" bIns="0" rtlCol="0" anchor="ctr"/>
           <a:lstStyle/>
           <a:p>
-            <a:pPr algn="l" indent="0" marL="0">
+            <a:pPr eaLnBrk="0" algn="l" indent="0" marL="0">
               <a:buNone/>
             </a:pPr>
             <a:r>
@@ -3275,7 +3275,7 @@
           <a:bodyPr wrap="square" lIns="177800" tIns="0" rIns="177800" bIns="0" rtlCol="0" anchor="ctr"/>
           <a:lstStyle/>
           <a:p>
-            <a:pPr algn="l" indent="0" marL="0">
+            <a:pPr eaLnBrk="0" algn="l" indent="0" marL="0">
               <a:buNone/>
             </a:pPr>
             <a:r>
@@ -3314,7 +3314,7 @@
           <a:bodyPr wrap="square" lIns="0" tIns="0" rIns="0" bIns="0" rtlCol="0" anchor="ctr"/>
           <a:lstStyle/>
           <a:p>
-            <a:pPr algn="l" indent="0" marL="0">
+            <a:pPr eaLnBrk="0" algn="l" indent="0" marL="0">
               <a:buNone/>
             </a:pPr>
             <a:r>
@@ -3353,7 +3353,7 @@
           <a:bodyPr wrap="square" lIns="0" tIns="0" rIns="0" bIns="0" rtlCol="0" anchor="ctr"/>
           <a:lstStyle/>
           <a:p>
-            <a:pPr algn="l" indent="0" marL="0">
+            <a:pPr eaLnBrk="0" algn="l" indent="0" marL="0">
               <a:buNone/>
             </a:pPr>
             <a:r>
@@ -3410,7 +3410,7 @@
             </a:lvl1pPr>
           </a:lstStyle>
           <a:p>
-            <a:pPr algn="r"/>
+            <a:pPr eaLnBrk="0" algn="r"/>
             <a:fld id="{F7021451-1387-4CA6-816F-3879F97B5CBC}" type="slidenum">
               <a:rPr b="0" lang="en-US"/>
               <a:t>10</a:t>
@@ -3467,7 +3467,7 @@
           <a:bodyPr wrap="square" lIns="0" tIns="0" rIns="0" bIns="0" rtlCol="0" anchor="ctr"/>
           <a:lstStyle/>
           <a:p>
-            <a:pPr algn="l" indent="0" marL="0">
+            <a:pPr eaLnBrk="0" algn="l" indent="0" marL="0">
               <a:buNone/>
             </a:pPr>
             <a:r>
@@ -3533,7 +3533,7 @@
           <a:bodyPr wrap="square" lIns="0" tIns="0" rIns="0" bIns="0" rtlCol="0" anchor="ctr"/>
           <a:lstStyle/>
           <a:p>
-            <a:pPr indent="0" marL="0">
+            <a:pPr eaLnBrk="0" indent="0" marL="0">
               <a:spcAft>
                 <a:spcPts val="600"/>
               </a:spcAft>
@@ -3583,7 +3583,7 @@
           <a:bodyPr wrap="square" lIns="0" tIns="0" rIns="0" bIns="0" rtlCol="0" anchor="ctr"/>
           <a:lstStyle/>
           <a:p>
-            <a:pPr algn="ctr" indent="0" marL="0">
+            <a:pPr eaLnBrk="0" algn="ctr" indent="0" marL="0">
               <a:buNone/>
             </a:pPr>
             <a:r>
@@ -3649,7 +3649,7 @@
           <a:bodyPr wrap="square" lIns="0" tIns="0" rIns="0" bIns="0" rtlCol="0" anchor="ctr"/>
           <a:lstStyle/>
           <a:p>
-            <a:pPr indent="0" marL="0">
+            <a:pPr eaLnBrk="0" indent="0" marL="0">
               <a:spcAft>
                 <a:spcPts val="600"/>
               </a:spcAft>
@@ -3699,7 +3699,7 @@
           <a:bodyPr wrap="square" lIns="0" tIns="0" rIns="0" bIns="0" rtlCol="0" anchor="ctr"/>
           <a:lstStyle/>
           <a:p>
-            <a:pPr algn="ctr" indent="0" marL="0">
+            <a:pPr eaLnBrk="0" algn="ctr" indent="0" marL="0">
               <a:buNone/>
             </a:pPr>
             <a:r>
@@ -3765,7 +3765,7 @@
           <a:bodyPr wrap="square" lIns="0" tIns="0" rIns="0" bIns="0" rtlCol="0" anchor="ctr"/>
           <a:lstStyle/>
           <a:p>
-            <a:pPr indent="0" marL="0">
+            <a:pPr eaLnBrk="0" indent="0" marL="0">
               <a:spcAft>
                 <a:spcPts val="600"/>
               </a:spcAft>
@@ -3815,7 +3815,7 @@
           <a:bodyPr wrap="square" lIns="0" tIns="0" rIns="0" bIns="0" rtlCol="0" anchor="ctr"/>
           <a:lstStyle/>
           <a:p>
-            <a:pPr algn="ctr" indent="0" marL="0">
+            <a:pPr eaLnBrk="0" algn="ctr" indent="0" marL="0">
               <a:buNone/>
             </a:pPr>
             <a:r>
@@ -3881,7 +3881,7 @@
           <a:bodyPr wrap="square" lIns="0" tIns="0" rIns="0" bIns="0" rtlCol="0" anchor="ctr"/>
           <a:lstStyle/>
           <a:p>
-            <a:pPr indent="0" marL="0">
+            <a:pPr eaLnBrk="0" indent="0" marL="0">
               <a:spcAft>
                 <a:spcPts val="600"/>
               </a:spcAft>
@@ -3941,7 +3941,7 @@
             </a:lvl1pPr>
           </a:lstStyle>
           <a:p>
-            <a:pPr algn="r"/>
+            <a:pPr eaLnBrk="0" algn="r"/>
             <a:fld id="{F7021451-1387-4CA6-816F-3879F97B5CBC}" type="slidenum">
               <a:rPr b="0" lang="en-US"/>
               <a:t>11</a:t>
@@ -3998,7 +3998,7 @@
           <a:bodyPr wrap="square" lIns="0" tIns="0" rIns="0" bIns="0" rtlCol="0" anchor="ctr"/>
           <a:lstStyle/>
           <a:p>
-            <a:pPr algn="l" indent="0" marL="0">
+            <a:pPr eaLnBrk="0" algn="l" indent="0" marL="0">
               <a:buNone/>
             </a:pPr>
             <a:r>
@@ -4064,7 +4064,7 @@
           <a:bodyPr wrap="square" lIns="0" tIns="0" rIns="0" bIns="0" rtlCol="0" anchor="ctr"/>
           <a:lstStyle/>
           <a:p>
-            <a:pPr indent="0" marL="0">
+            <a:pPr eaLnBrk="0" indent="0" marL="0">
               <a:spcAft>
                 <a:spcPts val="600"/>
               </a:spcAft>
@@ -4114,7 +4114,7 @@
           <a:bodyPr wrap="square" lIns="177800" tIns="0" rIns="177800" bIns="0" rtlCol="0" anchor="ctr"/>
           <a:lstStyle/>
           <a:p>
-            <a:pPr algn="l" indent="0" marL="0">
+            <a:pPr eaLnBrk="0" algn="l" indent="0" marL="0">
               <a:buNone/>
             </a:pPr>
             <a:r>
@@ -4161,7 +4161,7 @@
           <a:bodyPr wrap="square" lIns="177800" tIns="0" rIns="177800" bIns="0" rtlCol="0" anchor="ctr"/>
           <a:lstStyle/>
           <a:p>
-            <a:pPr algn="l" indent="0" marL="0">
+            <a:pPr eaLnBrk="0" algn="l" indent="0" marL="0">
               <a:buNone/>
             </a:pPr>
             <a:r>
@@ -4200,7 +4200,7 @@
           <a:bodyPr wrap="square" lIns="0" tIns="0" rIns="0" bIns="0" rtlCol="0" anchor="t"/>
           <a:lstStyle/>
           <a:p>
-            <a:pPr algn="l" indent="0" marL="0">
+            <a:pPr eaLnBrk="0" algn="l" indent="0" marL="0">
               <a:buNone/>
             </a:pPr>
             <a:r>
@@ -4239,7 +4239,7 @@
           <a:bodyPr wrap="square" lIns="0" tIns="0" rIns="0" bIns="0" rtlCol="0" anchor="ctr"/>
           <a:lstStyle/>
           <a:p>
-            <a:pPr algn="l" indent="0" marL="0">
+            <a:pPr eaLnBrk="0" algn="l" indent="0" marL="0">
               <a:buNone/>
             </a:pPr>
             <a:r>
@@ -4278,7 +4278,7 @@
           <a:bodyPr wrap="square" lIns="0" tIns="0" rIns="0" bIns="0" rtlCol="0" anchor="ctr"/>
           <a:lstStyle/>
           <a:p>
-            <a:pPr algn="l" indent="0" marL="0">
+            <a:pPr eaLnBrk="0" algn="l" indent="0" marL="0">
               <a:buNone/>
             </a:pPr>
             <a:r>
@@ -4317,7 +4317,7 @@
           <a:bodyPr wrap="square" lIns="0" tIns="0" rIns="0" bIns="0" rtlCol="0" anchor="ctr"/>
           <a:lstStyle/>
           <a:p>
-            <a:pPr algn="l" indent="0" marL="0">
+            <a:pPr eaLnBrk="0" algn="l" indent="0" marL="0">
               <a:buNone/>
             </a:pPr>
             <a:r>
@@ -4356,7 +4356,7 @@
           <a:bodyPr wrap="square" lIns="0" tIns="0" rIns="0" bIns="0" rtlCol="0" anchor="ctr"/>
           <a:lstStyle/>
           <a:p>
-            <a:pPr algn="l" indent="0" marL="0">
+            <a:pPr eaLnBrk="0" algn="l" indent="0" marL="0">
               <a:buNone/>
             </a:pPr>
             <a:r>
@@ -4413,7 +4413,7 @@
             </a:lvl1pPr>
           </a:lstStyle>
           <a:p>
-            <a:pPr algn="r"/>
+            <a:pPr eaLnBrk="0" algn="r"/>
             <a:fld id="{F7021451-1387-4CA6-816F-3879F97B5CBC}" type="slidenum">
               <a:rPr b="0" lang="en-US"/>
               <a:t>12</a:t>
@@ -4470,7 +4470,7 @@
           <a:bodyPr wrap="square" lIns="0" tIns="0" rIns="0" bIns="0" rtlCol="0" anchor="ctr"/>
           <a:lstStyle/>
           <a:p>
-            <a:pPr algn="l" indent="0" marL="0">
+            <a:pPr eaLnBrk="0" algn="l" indent="0" marL="0">
               <a:buNone/>
             </a:pPr>
             <a:r>
@@ -4536,7 +4536,7 @@
           <a:bodyPr wrap="square" lIns="0" tIns="0" rIns="0" bIns="0" rtlCol="0" anchor="ctr"/>
           <a:lstStyle/>
           <a:p>
-            <a:pPr indent="0" marL="0">
+            <a:pPr eaLnBrk="0" indent="0" marL="0">
               <a:spcAft>
                 <a:spcPts val="600"/>
               </a:spcAft>
@@ -4605,7 +4605,7 @@
           <a:bodyPr wrap="square" lIns="0" tIns="0" rIns="0" bIns="0" rtlCol="0" anchor="ctr"/>
           <a:lstStyle/>
           <a:p>
-            <a:pPr indent="0" marL="0">
+            <a:pPr eaLnBrk="0" indent="0" marL="0">
               <a:spcAft>
                 <a:spcPts val="600"/>
               </a:spcAft>
@@ -4655,7 +4655,7 @@
           <a:bodyPr wrap="square" lIns="76200" tIns="50800" rIns="76200" bIns="50800" rtlCol="0" anchor="ctr"/>
           <a:lstStyle/>
           <a:p>
-            <a:pPr algn="ctr" indent="0" marL="0">
+            <a:pPr eaLnBrk="0" algn="ctr" indent="0" marL="0">
               <a:buNone/>
             </a:pPr>
             <a:r>
@@ -4672,7 +4672,7 @@
             <a:endParaRPr lang="ko-KR" sz="3400" dirty="0"/>
           </a:p>
           <a:p>
-            <a:pPr algn="ctr" indent="0" marL="0">
+            <a:pPr eaLnBrk="0" algn="ctr" indent="0" marL="0">
               <a:buNone/>
             </a:pPr>
             <a:r>
@@ -4719,7 +4719,7 @@
           <a:bodyPr wrap="square" lIns="76200" tIns="50800" rIns="76200" bIns="50800" rtlCol="0" anchor="ctr"/>
           <a:lstStyle/>
           <a:p>
-            <a:pPr algn="ctr" indent="0" marL="0">
+            <a:pPr eaLnBrk="0" algn="ctr" indent="0" marL="0">
               <a:buNone/>
             </a:pPr>
             <a:r>
@@ -4766,7 +4766,7 @@
           <a:bodyPr wrap="square" lIns="76200" tIns="50800" rIns="76200" bIns="50800" rtlCol="0" anchor="ctr"/>
           <a:lstStyle/>
           <a:p>
-            <a:pPr algn="ctr" indent="0" marL="0">
+            <a:pPr eaLnBrk="0" algn="ctr" indent="0" marL="0">
               <a:buNone/>
             </a:pPr>
             <a:r>
@@ -4813,7 +4813,7 @@
           <a:bodyPr wrap="square" lIns="76200" tIns="50800" rIns="76200" bIns="50800" rtlCol="0" anchor="ctr"/>
           <a:lstStyle/>
           <a:p>
-            <a:pPr algn="ctr" indent="0" marL="0">
+            <a:pPr eaLnBrk="0" algn="ctr" indent="0" marL="0">
               <a:buNone/>
             </a:pPr>
             <a:r>
@@ -4870,7 +4870,7 @@
             </a:lvl1pPr>
           </a:lstStyle>
           <a:p>
-            <a:pPr algn="r"/>
+            <a:pPr eaLnBrk="0" algn="r"/>
             <a:fld id="{F7021451-1387-4CA6-816F-3879F97B5CBC}" type="slidenum">
               <a:rPr b="0" lang="en-US"/>
               <a:t>13</a:t>
@@ -4927,7 +4927,7 @@
           <a:bodyPr wrap="square" lIns="0" tIns="0" rIns="0" bIns="0" rtlCol="0" anchor="ctr"/>
           <a:lstStyle/>
           <a:p>
-            <a:pPr algn="l" indent="0" marL="0">
+            <a:pPr eaLnBrk="0" algn="l" indent="0" marL="0">
               <a:buNone/>
             </a:pPr>
             <a:r>
@@ -4993,7 +4993,7 @@
           <a:bodyPr wrap="square" lIns="0" tIns="0" rIns="0" bIns="0" rtlCol="0" anchor="ctr"/>
           <a:lstStyle/>
           <a:p>
-            <a:pPr indent="0" marL="0">
+            <a:pPr eaLnBrk="0" indent="0" marL="0">
               <a:spcAft>
                 <a:spcPts val="600"/>
               </a:spcAft>
@@ -5062,7 +5062,7 @@
           <a:bodyPr wrap="square" lIns="0" tIns="0" rIns="0" bIns="0" rtlCol="0" anchor="t"/>
           <a:lstStyle/>
           <a:p>
-            <a:pPr indent="0" marL="0">
+            <a:pPr eaLnBrk="0" algn="l" indent="0" marL="0">
               <a:lnSpc>
                 <a:spcPct val="105000"/>
               </a:lnSpc>
@@ -5085,7 +5085,7 @@
             <a:endParaRPr lang="ko-KR" sz="3000" dirty="0"/>
           </a:p>
           <a:p>
-            <a:pPr indent="0" marL="0">
+            <a:pPr eaLnBrk="0" algn="l" indent="0" marL="0">
               <a:lnSpc>
                 <a:spcPct val="105000"/>
               </a:lnSpc>
@@ -5108,7 +5108,7 @@
             <a:endParaRPr lang="ko-KR" sz="3000" dirty="0"/>
           </a:p>
           <a:p>
-            <a:pPr indent="0" marL="0">
+            <a:pPr eaLnBrk="0" algn="l" indent="0" marL="0">
               <a:lnSpc>
                 <a:spcPct val="105000"/>
               </a:lnSpc>
@@ -5131,7 +5131,7 @@
             <a:endParaRPr lang="ko-KR" sz="3000" dirty="0"/>
           </a:p>
           <a:p>
-            <a:pPr indent="0" marL="0">
+            <a:pPr eaLnBrk="0" algn="l" indent="0" marL="0">
               <a:lnSpc>
                 <a:spcPct val="105000"/>
               </a:lnSpc>
@@ -5194,7 +5194,7 @@
             </a:lvl1pPr>
           </a:lstStyle>
           <a:p>
-            <a:pPr algn="r"/>
+            <a:pPr eaLnBrk="0" algn="r"/>
             <a:fld id="{F7021451-1387-4CA6-816F-3879F97B5CBC}" type="slidenum">
               <a:rPr b="0" lang="en-US"/>
               <a:t>2</a:t>
@@ -5251,7 +5251,7 @@
           <a:bodyPr wrap="square" lIns="0" tIns="0" rIns="0" bIns="0" rtlCol="0" anchor="ctr"/>
           <a:lstStyle/>
           <a:p>
-            <a:pPr algn="l" indent="0" marL="0">
+            <a:pPr eaLnBrk="0" algn="l" indent="0" marL="0">
               <a:buNone/>
             </a:pPr>
             <a:r>
@@ -5317,7 +5317,7 @@
           <a:bodyPr wrap="square" lIns="0" tIns="0" rIns="0" bIns="0" rtlCol="0" anchor="ctr"/>
           <a:lstStyle/>
           <a:p>
-            <a:pPr indent="0" marL="0">
+            <a:pPr eaLnBrk="0" indent="0" marL="0">
               <a:spcAft>
                 <a:spcPts val="600"/>
               </a:spcAft>
@@ -5386,7 +5386,7 @@
           <a:bodyPr wrap="square" lIns="0" tIns="0" rIns="0" bIns="0" rtlCol="0" anchor="ctr"/>
           <a:lstStyle/>
           <a:p>
-            <a:pPr indent="0" marL="0">
+            <a:pPr eaLnBrk="0" indent="0" marL="0">
               <a:spcAft>
                 <a:spcPts val="600"/>
               </a:spcAft>
@@ -5406,7 +5406,7 @@
             <a:endParaRPr lang="ko-KR" sz="3000" dirty="0"/>
           </a:p>
           <a:p>
-            <a:pPr indent="0" marL="0">
+            <a:pPr eaLnBrk="0" indent="0" marL="0">
               <a:spcAft>
                 <a:spcPts val="600"/>
               </a:spcAft>
@@ -5475,7 +5475,7 @@
           <a:bodyPr wrap="square" lIns="0" tIns="0" rIns="0" bIns="0" rtlCol="0" anchor="ctr"/>
           <a:lstStyle/>
           <a:p>
-            <a:pPr indent="0" marL="0">
+            <a:pPr eaLnBrk="0" indent="0" marL="0">
               <a:spcAft>
                 <a:spcPts val="600"/>
               </a:spcAft>
@@ -5495,7 +5495,7 @@
             <a:endParaRPr lang="ko-KR" sz="3000" dirty="0"/>
           </a:p>
           <a:p>
-            <a:pPr indent="0" marL="0">
+            <a:pPr eaLnBrk="0" indent="0" marL="0">
               <a:spcAft>
                 <a:spcPts val="600"/>
               </a:spcAft>
@@ -5564,7 +5564,7 @@
           <a:bodyPr wrap="square" lIns="0" tIns="0" rIns="0" bIns="0" rtlCol="0" anchor="ctr"/>
           <a:lstStyle/>
           <a:p>
-            <a:pPr indent="0" marL="0">
+            <a:pPr eaLnBrk="0" indent="0" marL="0">
               <a:spcAft>
                 <a:spcPts val="600"/>
               </a:spcAft>
@@ -5584,7 +5584,7 @@
             <a:endParaRPr lang="ko-KR" sz="3000" dirty="0"/>
           </a:p>
           <a:p>
-            <a:pPr indent="0" marL="0">
+            <a:pPr eaLnBrk="0" indent="0" marL="0">
               <a:spcAft>
                 <a:spcPts val="600"/>
               </a:spcAft>
@@ -5644,7 +5644,7 @@
             </a:lvl1pPr>
           </a:lstStyle>
           <a:p>
-            <a:pPr algn="r"/>
+            <a:pPr eaLnBrk="0" algn="r"/>
             <a:fld id="{F7021451-1387-4CA6-816F-3879F97B5CBC}" type="slidenum">
               <a:rPr b="0" lang="en-US"/>
               <a:t>3</a:t>
@@ -5701,7 +5701,7 @@
           <a:bodyPr wrap="square" lIns="0" tIns="0" rIns="0" bIns="0" rtlCol="0" anchor="ctr"/>
           <a:lstStyle/>
           <a:p>
-            <a:pPr algn="l" indent="0" marL="0">
+            <a:pPr eaLnBrk="0" algn="l" indent="0" marL="0">
               <a:buNone/>
             </a:pPr>
             <a:r>
@@ -5767,7 +5767,7 @@
           <a:bodyPr wrap="square" lIns="0" tIns="0" rIns="0" bIns="0" rtlCol="0" anchor="ctr"/>
           <a:lstStyle/>
           <a:p>
-            <a:pPr indent="0" marL="0">
+            <a:pPr eaLnBrk="0" indent="0" marL="0">
               <a:spcAft>
                 <a:spcPts val="600"/>
               </a:spcAft>
@@ -5836,7 +5836,7 @@
           <a:bodyPr wrap="square" lIns="0" tIns="0" rIns="0" bIns="0" rtlCol="0" anchor="t"/>
           <a:lstStyle/>
           <a:p>
-            <a:pPr indent="0" marL="0">
+            <a:pPr eaLnBrk="0" algn="l" indent="0" marL="0">
               <a:lnSpc>
                 <a:spcPct val="105000"/>
               </a:lnSpc>
@@ -5899,7 +5899,7 @@
             </a:lvl1pPr>
           </a:lstStyle>
           <a:p>
-            <a:pPr algn="r"/>
+            <a:pPr eaLnBrk="0" algn="r"/>
             <a:fld id="{F7021451-1387-4CA6-816F-3879F97B5CBC}" type="slidenum">
               <a:rPr b="0" lang="en-US"/>
               <a:t>4</a:t>
@@ -5956,7 +5956,7 @@
           <a:bodyPr wrap="square" lIns="0" tIns="0" rIns="0" bIns="0" rtlCol="0" anchor="ctr"/>
           <a:lstStyle/>
           <a:p>
-            <a:pPr algn="l" indent="0" marL="0">
+            <a:pPr eaLnBrk="0" algn="l" indent="0" marL="0">
               <a:buNone/>
             </a:pPr>
             <a:r>
@@ -6022,7 +6022,7 @@
           <a:bodyPr wrap="square" lIns="0" tIns="0" rIns="0" bIns="0" rtlCol="0" anchor="ctr"/>
           <a:lstStyle/>
           <a:p>
-            <a:pPr indent="0" marL="0">
+            <a:pPr eaLnBrk="0" indent="0" marL="0">
               <a:spcAft>
                 <a:spcPts val="600"/>
               </a:spcAft>
@@ -6091,7 +6091,7 @@
           <a:bodyPr wrap="square" lIns="0" tIns="0" rIns="0" bIns="0" rtlCol="0" anchor="ctr"/>
           <a:lstStyle/>
           <a:p>
-            <a:pPr indent="0" marL="0">
+            <a:pPr eaLnBrk="0" indent="0" marL="0">
               <a:spcAft>
                 <a:spcPts val="600"/>
               </a:spcAft>
@@ -6111,7 +6111,7 @@
             <a:endParaRPr lang="ko-KR" sz="3000" dirty="0"/>
           </a:p>
           <a:p>
-            <a:pPr indent="0" marL="0">
+            <a:pPr eaLnBrk="0" indent="0" marL="0">
               <a:spcAft>
                 <a:spcPts val="600"/>
               </a:spcAft>
@@ -6180,7 +6180,7 @@
           <a:bodyPr wrap="square" lIns="0" tIns="0" rIns="0" bIns="0" rtlCol="0" anchor="ctr"/>
           <a:lstStyle/>
           <a:p>
-            <a:pPr indent="0" marL="0">
+            <a:pPr eaLnBrk="0" indent="0" marL="0">
               <a:spcAft>
                 <a:spcPts val="600"/>
               </a:spcAft>
@@ -6200,7 +6200,7 @@
             <a:endParaRPr lang="ko-KR" sz="3000" dirty="0"/>
           </a:p>
           <a:p>
-            <a:pPr indent="0" marL="0">
+            <a:pPr eaLnBrk="0" indent="0" marL="0">
               <a:spcAft>
                 <a:spcPts val="600"/>
               </a:spcAft>
@@ -6269,7 +6269,7 @@
           <a:bodyPr wrap="square" lIns="0" tIns="0" rIns="0" bIns="0" rtlCol="0" anchor="ctr"/>
           <a:lstStyle/>
           <a:p>
-            <a:pPr indent="0" marL="0">
+            <a:pPr eaLnBrk="0" indent="0" marL="0">
               <a:spcAft>
                 <a:spcPts val="600"/>
               </a:spcAft>
@@ -6289,7 +6289,7 @@
             <a:endParaRPr lang="ko-KR" sz="3000" dirty="0"/>
           </a:p>
           <a:p>
-            <a:pPr indent="0" marL="0">
+            <a:pPr eaLnBrk="0" indent="0" marL="0">
               <a:spcAft>
                 <a:spcPts val="600"/>
               </a:spcAft>
@@ -6358,7 +6358,7 @@
           <a:bodyPr wrap="square" lIns="0" tIns="0" rIns="0" bIns="0" rtlCol="0" anchor="ctr"/>
           <a:lstStyle/>
           <a:p>
-            <a:pPr indent="0" marL="0">
+            <a:pPr eaLnBrk="0" indent="0" marL="0">
               <a:spcAft>
                 <a:spcPts val="600"/>
               </a:spcAft>
@@ -6378,7 +6378,7 @@
             <a:endParaRPr lang="ko-KR" sz="3000" dirty="0"/>
           </a:p>
           <a:p>
-            <a:pPr indent="0" marL="0">
+            <a:pPr eaLnBrk="0" indent="0" marL="0">
               <a:spcAft>
                 <a:spcPts val="600"/>
               </a:spcAft>
@@ -6438,7 +6438,7 @@
             </a:lvl1pPr>
           </a:lstStyle>
           <a:p>
-            <a:pPr algn="r"/>
+            <a:pPr eaLnBrk="0" algn="r"/>
             <a:fld id="{F7021451-1387-4CA6-816F-3879F97B5CBC}" type="slidenum">
               <a:rPr b="0" lang="en-US"/>
               <a:t>5</a:t>
@@ -6495,7 +6495,7 @@
           <a:bodyPr wrap="square" lIns="0" tIns="0" rIns="0" bIns="0" rtlCol="0" anchor="ctr"/>
           <a:lstStyle/>
           <a:p>
-            <a:pPr algn="l" indent="0" marL="0">
+            <a:pPr eaLnBrk="0" algn="l" indent="0" marL="0">
               <a:buNone/>
             </a:pPr>
             <a:r>
@@ -6561,7 +6561,7 @@
           <a:bodyPr wrap="square" lIns="0" tIns="0" rIns="0" bIns="0" rtlCol="0" anchor="ctr"/>
           <a:lstStyle/>
           <a:p>
-            <a:pPr indent="0" marL="0">
+            <a:pPr eaLnBrk="0" indent="0" marL="0">
               <a:spcAft>
                 <a:spcPts val="600"/>
               </a:spcAft>
@@ -6630,7 +6630,7 @@
           <a:bodyPr wrap="square" lIns="0" tIns="0" rIns="0" bIns="0" rtlCol="0" anchor="t"/>
           <a:lstStyle/>
           <a:p>
-            <a:pPr indent="0" marL="0">
+            <a:pPr eaLnBrk="0" algn="l" indent="0" marL="0">
               <a:lnSpc>
                 <a:spcPct val="105000"/>
               </a:lnSpc>
@@ -6693,7 +6693,7 @@
             </a:lvl1pPr>
           </a:lstStyle>
           <a:p>
-            <a:pPr algn="r"/>
+            <a:pPr eaLnBrk="0" algn="r"/>
             <a:fld id="{F7021451-1387-4CA6-816F-3879F97B5CBC}" type="slidenum">
               <a:rPr b="0" lang="en-US"/>
               <a:t>6</a:t>
@@ -6750,7 +6750,7 @@
           <a:bodyPr wrap="square" lIns="0" tIns="0" rIns="0" bIns="0" rtlCol="0" anchor="ctr"/>
           <a:lstStyle/>
           <a:p>
-            <a:pPr algn="l" indent="0" marL="0">
+            <a:pPr eaLnBrk="0" algn="l" indent="0" marL="0">
               <a:buNone/>
             </a:pPr>
             <a:r>
@@ -6816,7 +6816,7 @@
           <a:bodyPr wrap="square" lIns="0" tIns="0" rIns="0" bIns="0" rtlCol="0" anchor="ctr"/>
           <a:lstStyle/>
           <a:p>
-            <a:pPr indent="0" marL="0">
+            <a:pPr eaLnBrk="0" indent="0" marL="0">
               <a:spcAft>
                 <a:spcPts val="600"/>
               </a:spcAft>
@@ -6885,7 +6885,7 @@
           <a:bodyPr wrap="square" lIns="0" tIns="0" rIns="0" bIns="0" rtlCol="0" anchor="ctr"/>
           <a:lstStyle/>
           <a:p>
-            <a:pPr indent="0" marL="0">
+            <a:pPr eaLnBrk="0" indent="0" marL="0">
               <a:spcAft>
                 <a:spcPts val="600"/>
               </a:spcAft>
@@ -6935,7 +6935,7 @@
           <a:bodyPr wrap="square" lIns="177800" tIns="0" rIns="177800" bIns="0" rtlCol="0" anchor="ctr"/>
           <a:lstStyle/>
           <a:p>
-            <a:pPr algn="l" indent="0" marL="0">
+            <a:pPr eaLnBrk="0" algn="l" indent="0" marL="0">
               <a:buNone/>
             </a:pPr>
             <a:r>
@@ -6974,7 +6974,7 @@
           <a:bodyPr wrap="square" lIns="0" tIns="0" rIns="0" bIns="0" rtlCol="0" anchor="t"/>
           <a:lstStyle/>
           <a:p>
-            <a:pPr algn="l" indent="0" marL="0">
+            <a:pPr eaLnBrk="0" algn="l" indent="0" marL="0">
               <a:buNone/>
             </a:pPr>
             <a:r>
@@ -7021,7 +7021,7 @@
           <a:bodyPr wrap="square" lIns="177800" tIns="0" rIns="177800" bIns="0" rtlCol="0" anchor="ctr"/>
           <a:lstStyle/>
           <a:p>
-            <a:pPr algn="l" indent="0" marL="0">
+            <a:pPr eaLnBrk="0" algn="l" indent="0" marL="0">
               <a:buNone/>
             </a:pPr>
             <a:r>
@@ -7060,7 +7060,7 @@
           <a:bodyPr wrap="square" lIns="0" tIns="0" rIns="0" bIns="0" rtlCol="0" anchor="t"/>
           <a:lstStyle/>
           <a:p>
-            <a:pPr algn="l" indent="0" marL="0">
+            <a:pPr eaLnBrk="0" algn="l" indent="0" marL="0">
               <a:buNone/>
             </a:pPr>
             <a:r>
@@ -7117,7 +7117,7 @@
             </a:lvl1pPr>
           </a:lstStyle>
           <a:p>
-            <a:pPr algn="r"/>
+            <a:pPr eaLnBrk="0" algn="r"/>
             <a:fld id="{F7021451-1387-4CA6-816F-3879F97B5CBC}" type="slidenum">
               <a:rPr b="0" lang="en-US"/>
               <a:t>7</a:t>
@@ -7174,7 +7174,7 @@
           <a:bodyPr wrap="square" lIns="0" tIns="0" rIns="0" bIns="0" rtlCol="0" anchor="ctr"/>
           <a:lstStyle/>
           <a:p>
-            <a:pPr algn="l" indent="0" marL="0">
+            <a:pPr eaLnBrk="0" algn="l" indent="0" marL="0">
               <a:buNone/>
             </a:pPr>
             <a:r>
@@ -7219,7 +7219,7 @@
           <a:bodyPr wrap="square" lIns="0" tIns="0" rIns="0" bIns="0" rtlCol="0" anchor="ctr"/>
           <a:lstStyle/>
           <a:p>
-            <a:pPr algn="ctr" indent="0" marL="0">
+            <a:pPr eaLnBrk="0" algn="ctr" indent="0" marL="0">
               <a:buNone/>
             </a:pPr>
             <a:r>
@@ -7258,7 +7258,7 @@
           <a:bodyPr wrap="square" lIns="0" tIns="0" rIns="0" bIns="0" rtlCol="0" anchor="t"/>
           <a:lstStyle/>
           <a:p>
-            <a:pPr algn="l" indent="0" marL="0">
+            <a:pPr eaLnBrk="0" algn="l" indent="0" marL="0">
               <a:buNone/>
             </a:pPr>
             <a:r>
@@ -7303,7 +7303,7 @@
           <a:bodyPr wrap="square" lIns="0" tIns="0" rIns="0" bIns="0" rtlCol="0" anchor="ctr"/>
           <a:lstStyle/>
           <a:p>
-            <a:pPr algn="ctr" indent="0" marL="0">
+            <a:pPr eaLnBrk="0" algn="ctr" indent="0" marL="0">
               <a:buNone/>
             </a:pPr>
             <a:r>
@@ -7342,7 +7342,7 @@
           <a:bodyPr wrap="square" lIns="0" tIns="0" rIns="0" bIns="0" rtlCol="0" anchor="t"/>
           <a:lstStyle/>
           <a:p>
-            <a:pPr algn="l" indent="0" marL="0">
+            <a:pPr eaLnBrk="0" algn="l" indent="0" marL="0">
               <a:buNone/>
             </a:pPr>
             <a:r>
@@ -7387,7 +7387,7 @@
           <a:bodyPr wrap="square" lIns="0" tIns="0" rIns="0" bIns="0" rtlCol="0" anchor="ctr"/>
           <a:lstStyle/>
           <a:p>
-            <a:pPr algn="ctr" indent="0" marL="0">
+            <a:pPr eaLnBrk="0" algn="ctr" indent="0" marL="0">
               <a:buNone/>
             </a:pPr>
             <a:r>
@@ -7426,7 +7426,7 @@
           <a:bodyPr wrap="square" lIns="0" tIns="0" rIns="0" bIns="0" rtlCol="0" anchor="t"/>
           <a:lstStyle/>
           <a:p>
-            <a:pPr algn="l" indent="0" marL="0">
+            <a:pPr eaLnBrk="0" algn="l" indent="0" marL="0">
               <a:buNone/>
             </a:pPr>
             <a:r>
@@ -7471,7 +7471,7 @@
           <a:bodyPr wrap="square" lIns="0" tIns="0" rIns="0" bIns="0" rtlCol="0" anchor="ctr"/>
           <a:lstStyle/>
           <a:p>
-            <a:pPr algn="ctr" indent="0" marL="0">
+            <a:pPr eaLnBrk="0" algn="ctr" indent="0" marL="0">
               <a:buNone/>
             </a:pPr>
             <a:r>
@@ -7510,7 +7510,7 @@
           <a:bodyPr wrap="square" lIns="0" tIns="0" rIns="0" bIns="0" rtlCol="0" anchor="t"/>
           <a:lstStyle/>
           <a:p>
-            <a:pPr algn="l" indent="0" marL="0">
+            <a:pPr eaLnBrk="0" algn="l" indent="0" marL="0">
               <a:buNone/>
             </a:pPr>
             <a:r>
@@ -7567,7 +7567,7 @@
             </a:lvl1pPr>
           </a:lstStyle>
           <a:p>
-            <a:pPr algn="r"/>
+            <a:pPr eaLnBrk="0" algn="r"/>
             <a:fld id="{F7021451-1387-4CA6-816F-3879F97B5CBC}" type="slidenum">
               <a:rPr b="0" lang="en-US"/>
               <a:t>8</a:t>
@@ -7624,7 +7624,7 @@
           <a:bodyPr wrap="square" lIns="0" tIns="0" rIns="0" bIns="0" rtlCol="0" anchor="ctr"/>
           <a:lstStyle/>
           <a:p>
-            <a:pPr algn="l" indent="0" marL="0">
+            <a:pPr eaLnBrk="0" algn="l" indent="0" marL="0">
               <a:buNone/>
             </a:pPr>
             <a:r>
@@ -7690,7 +7690,7 @@
           <a:bodyPr wrap="square" lIns="0" tIns="0" rIns="0" bIns="0" rtlCol="0" anchor="ctr"/>
           <a:lstStyle/>
           <a:p>
-            <a:pPr indent="0" marL="0">
+            <a:pPr eaLnBrk="0" indent="0" marL="0">
               <a:spcAft>
                 <a:spcPts val="600"/>
               </a:spcAft>
@@ -7759,7 +7759,7 @@
           <a:bodyPr wrap="square" lIns="0" tIns="0" rIns="0" bIns="0" rtlCol="0" anchor="t"/>
           <a:lstStyle/>
           <a:p>
-            <a:pPr indent="0" marL="0">
+            <a:pPr eaLnBrk="0" algn="l" indent="0" marL="0">
               <a:lnSpc>
                 <a:spcPct val="105000"/>
               </a:lnSpc>
@@ -7822,7 +7822,7 @@
             </a:lvl1pPr>
           </a:lstStyle>
           <a:p>
-            <a:pPr algn="r"/>
+            <a:pPr eaLnBrk="0" algn="r"/>
             <a:fld id="{F7021451-1387-4CA6-816F-3879F97B5CBC}" type="slidenum">
               <a:rPr b="0" lang="en-US"/>
               <a:t>9</a:t>

--- a/dist/초3/국어/읽기와어휘/초3_국어_읽기와어휘_01_문단의중심문장.pptx
+++ b/dist/초3/국어/읽기와어휘/초3_국어_읽기와어휘_01_문단의중심문장.pptx
@@ -119,39 +119,39 @@
   <p:extLst>
     <p:ext uri="{521415D9-36F7-43E2-AB2F-B90AF26B5E84}">
       <p14:sectionLst xmlns:p14="http://schemas.microsoft.com/office/powerpoint/2010/main">
-        <p14:section name="도입" id="{423df8b7-5438-887b-31b8-c1483b08a51b}">
+        <p14:section name="도입" id="{7128b22b-3e7a-192c-df98-cce13ab4f6bb}">
           <p14:sldIdLst>
             <p14:sldId id="256"/>
             <p14:sldId id="257"/>
           </p14:sldIdLst>
         </p14:section>
-        <p14:section name="개념" id="{38e9ca35-9b3f-e7bb-dd5c-b6ab5139a8c2}">
+        <p14:section name="개념" id="{3efa46b1-db1c-188f-53e5-83b2a6b4ab49}">
           <p14:sldIdLst>
             <p14:sldId id="258"/>
             <p14:sldId id="259"/>
             <p14:sldId id="260"/>
           </p14:sldIdLst>
         </p14:section>
-        <p14:section name="연습" id="{192c44af-edf4-efd9-8211-feab67d0acc4}">
+        <p14:section name="연습" id="{c1b58ef6-4425-3556-89d0-89dd74704547}">
           <p14:sldIdLst>
             <p14:sldId id="261"/>
             <p14:sldId id="262"/>
             <p14:sldId id="263"/>
           </p14:sldIdLst>
         </p14:section>
-        <p14:section name="확인" id="{6a8bbf26-52aa-a198-d756-1adcec1a4c5a}">
+        <p14:section name="확인" id="{f8b048e7-07b9-054f-c7b5-aa7f21a698d0}">
           <p14:sldIdLst>
             <p14:sldId id="264"/>
             <p14:sldId id="265"/>
             <p14:sldId id="266"/>
           </p14:sldIdLst>
         </p14:section>
-        <p14:section name="정리" id="{a4b0154c-fba9-9ff3-2443-bf205edcea21}">
+        <p14:section name="정리" id="{40a9ae05-ba65-638e-cb06-963dc000c785}">
           <p14:sldIdLst>
             <p14:sldId id="267"/>
           </p14:sldIdLst>
         </p14:section>
-        <p14:section name="보충" id="{1df86e43-7105-9eb9-c53d-21b90f0b4f22}">
+        <p14:section name="보충" id="{8240aae9-bced-029d-d311-4d098cc39173}">
           <p14:sldIdLst>
             <p14:sldId id="268"/>
           </p14:sldIdLst>
@@ -6521,12 +6521,12 @@
         </p:nvSpPr>
         <p:spPr>
           <a:xfrm>
-            <a:off x="548640" y="5349240"/>
-            <a:ext cx="11091672" cy="868680"/>
+            <a:off x="548640" y="4959096"/>
+            <a:ext cx="11091672" cy="1258824"/>
           </a:xfrm>
           <a:prstGeom prst="roundRect">
             <a:avLst>
-              <a:gd name="adj" fmla="val 12632"/>
+              <a:gd name="adj" fmla="val 8717"/>
             </a:avLst>
           </a:prstGeom>
           <a:solidFill>
@@ -6548,8 +6548,8 @@
         </p:nvSpPr>
         <p:spPr>
           <a:xfrm>
-            <a:off x="822960" y="5486400"/>
-            <a:ext cx="10543032" cy="594360"/>
+            <a:off x="822960" y="5096256"/>
+            <a:ext cx="10543032" cy="984504"/>
           </a:xfrm>
           <a:prstGeom prst="rect">
             <a:avLst/>
@@ -6591,11 +6591,11 @@
         <p:spPr>
           <a:xfrm>
             <a:off x="548640" y="1325880"/>
-            <a:ext cx="11091672" cy="3794760"/>
+            <a:ext cx="11091672" cy="3404616"/>
           </a:xfrm>
           <a:prstGeom prst="roundRect">
             <a:avLst>
-              <a:gd name="adj" fmla="val 2410"/>
+              <a:gd name="adj" fmla="val 2686"/>
             </a:avLst>
           </a:prstGeom>
           <a:solidFill>
@@ -6618,7 +6618,7 @@
         <p:spPr>
           <a:xfrm>
             <a:off x="822960" y="1508760"/>
-            <a:ext cx="10543032" cy="3429000"/>
+            <a:ext cx="10543032" cy="3038856"/>
           </a:xfrm>
           <a:prstGeom prst="rect">
             <a:avLst/>
